--- a/artifacts/slides/copilot-memory.pptx
+++ b/artifacts/slides/copilot-memory.pptx
@@ -506,7 +506,7 @@
               <a:t>Copilot Memory: what it does, where value comes from, and the bounded control story.,Exact lifecycle: public-preview. Public preview across supported Copilot surfaces; repository facts and user preferences have different scopes.,Verification date: 2026-10-14. Evidence older than 30 days requires re-review.,This is independent enablement for a controlled pilot, not production certification or customer-specific approval.,Cost detail: The reviewed Memory documentation does not specify a standalone memory-storage tariff. The underlying CLI, cloud-agent, and other model interactions still follow their billing model. Do not describe memory as unlimited or free because no separate price is listed.,Explicit assumptions:
 An eligible account with Memory allowed.
 One non-sensitive repository fact in a throwaway demo repository.
-No personal information, customer information, or user-scoped preference is stored.,Complete assessment: https://github.com/hammadorg93/copilot-runway/blob/main/features/copilot-memory/assessment.md,Presenter runbook: https://github.com/hammadorg93/copilot-runway/blob/main/demos/copilot-memory/README.md,Kit validation: kit-tested. Live feature validation: not-run.,Remote cleanup: With the repository owner's authorization, delete only this demo fact in repository Settings &gt; Copilot &gt; Memory. Never clear all memories.,Primary sources:
+No personal information, customer information, or user-scoped preference is stored.,Complete assessment: https://github.com/aj-enns/copilot-runway/blob/main/features/copilot-memory/assessment.md,Presenter runbook: https://github.com/aj-enns/copilot-runway/blob/main/demos/copilot-memory/README.md,Kit validation: kit-tested. Live feature validation: not-run.,Remote cleanup: With the repository owner's authorization, delete only this demo fact in repository Settings &gt; Copilot &gt; Memory. Never clear all memories.,Primary sources:
 About GitHub Copilot Memory: https://docs.github.com/en/copilot/concepts/agents/copilot-memory
 Usage-based billing for organizations and enterprises: https://docs.github.com/en/copilot/concepts/billing-and-usage/organizations-and-enterprises/billing
 GitHub Copilot licenses: https://docs.github.com/en/billing/concepts/product-billing/github-copilot-licenses
@@ -601,7 +601,7 @@
               <a:t>Copilot Memory: pilot decision, evidence gaps, cost assumptions, and how to start the repeatable demo kit.,Exact lifecycle: public-preview. Public preview across supported Copilot surfaces; repository facts and user preferences have different scopes.,Verification date: 2026-10-14. Evidence older than 30 days requires re-review.,This is independent enablement for a controlled pilot, not production certification or customer-specific approval.,Cost detail: The reviewed Memory documentation does not specify a standalone memory-storage tariff. The underlying CLI, cloud-agent, and other model interactions still follow their billing model. Do not describe memory as unlimited or free because no separate price is listed.,Explicit assumptions:
 An eligible account with Memory allowed.
 One non-sensitive repository fact in a throwaway demo repository.
-No personal information, customer information, or user-scoped preference is stored.,Complete assessment: https://github.com/hammadorg93/copilot-runway/blob/main/features/copilot-memory/assessment.md,Presenter runbook: https://github.com/hammadorg93/copilot-runway/blob/main/demos/copilot-memory/README.md,Kit validation: kit-tested. Live feature validation: not-run.,Remote cleanup: With the repository owner's authorization, delete only this demo fact in repository Settings &gt; Copilot &gt; Memory. Never clear all memories.,Primary sources:
+No personal information, customer information, or user-scoped preference is stored.,Complete assessment: https://github.com/aj-enns/copilot-runway/blob/main/features/copilot-memory/assessment.md,Presenter runbook: https://github.com/aj-enns/copilot-runway/blob/main/demos/copilot-memory/README.md,Kit validation: kit-tested. Live feature validation: not-run.,Remote cleanup: With the repository owner's authorization, delete only this demo fact in repository Settings &gt; Copilot &gt; Memory. Never clear all memories.,Primary sources:
 About GitHub Copilot Memory: https://docs.github.com/en/copilot/concepts/agents/copilot-memory
 Usage-based billing for organizations and enterprises: https://docs.github.com/en/copilot/concepts/billing-and-usage/organizations-and-enterprises/billing
 GitHub Copilot licenses: https://docs.github.com/en/billing/concepts/product-billing/github-copilot-licenses

--- a/artifacts/slides/copilot-memory.pptx
+++ b/artifacts/slides/copilot-memory.pptx
@@ -2318,13 +2318,13 @@
             <a:r>
               <a:rPr lang="en-US" sz="3000" b="1" dirty="0">
                 <a:solidFill>
-                  <a:srgbClr val="B11F4B"/>
-                </a:solidFill>
-                <a:latin typeface="Aptos" pitchFamily="34" charset="0"/>
-                <a:ea typeface="Aptos" pitchFamily="34" charset="-122"/>
-                <a:cs typeface="Aptos" pitchFamily="34" charset="-120"/>
-              </a:rPr>
-              <a:t>Pilot with conditions</a:t>
+                  <a:srgbClr val="B91C1C"/>
+                </a:solidFill>
+                <a:latin typeface="Aptos" pitchFamily="34" charset="0"/>
+                <a:ea typeface="Aptos" pitchFamily="34" charset="-122"/>
+                <a:cs typeface="Aptos" pitchFamily="34" charset="-120"/>
+              </a:rPr>
+              <a:t>Hold for evidence</a:t>
             </a:r>
             <a:endParaRPr lang="en-US" sz="3000" dirty="0"/>
           </a:p>
